--- a/public/fun/pack/pptx/weddingpro/결혼식프리미엄_21_소개중심_스카이펄.pptx
+++ b/public/fun/pack/pptx/weddingpro/결혼식프리미엄_21_소개중심_스카이펄.pptx
@@ -113,12 +113,12 @@
   <p:extLst>
     <p:ext uri="{521415D9-36F7-43E2-AB2F-B90AF26B5E84}">
       <p14:sectionLst xmlns:p14="http://schemas.microsoft.com/office/powerpoint/2010/main">
-        <p14:section name="시작" id="{940FBEDC-B5CD-4AA1-B01F-40536AB229EA}">
+        <p14:section name="시작" id="{EA2AF3E7-F3C4-46C8-A310-9140C99BD7AC}">
           <p14:sldIdLst>
             <p14:sldId id="256"/>
           </p14:sldIdLst>
         </p14:section>
-        <p14:section name="본문" id="{83444616-01EE-4708-847D-24E8B61D1503}">
+        <p14:section name="본문" id="{E305B707-DB36-48A0-A99E-4E99D1BC5871}">
           <p14:sldIdLst>
             <p14:sldId id="257"/>
             <p14:sldId id="258"/>
@@ -127,7 +127,7 @@
             <p14:sldId id="261"/>
           </p14:sldIdLst>
         </p14:section>
-        <p14:section name="마무리" id="{9ECA2B73-3BCC-455B-A24E-A7AFA784C878}">
+        <p14:section name="마무리" id="{E86D33DC-ED22-4388-9675-BA1EF41ABAA0}">
           <p14:sldIdLst>
             <p14:sldId id="262"/>
           </p14:sldIdLst>
@@ -1563,7 +1563,7 @@
             </a:lvl1pPr>
           </a:lstStyle>
           <a:p>
-            <a:fld id="{E1E972AD-7EC8-45CB-B380-33914BA733F9}" type="slidenum">
+            <a:fld id="{CAC9FE52-B4D3-496B-B742-802CC287864B}" type="slidenum">
               <a:rPr lang="en-US"/>
               <a:t>‹#›</a:t>
             </a:fld>
@@ -2208,7 +2208,7 @@
             </a:lvl1pPr>
           </a:lstStyle>
           <a:p>
-            <a:fld id="{266843E7-D746-4E89-A2C9-C8F9FC6CA845}" type="slidenum">
+            <a:fld id="{A790ABFA-F1C2-4C5B-8C84-F1B94F3772E1}" type="slidenum">
               <a:rPr lang="en-US"/>
               <a:t>‹#›</a:t>
             </a:fld>
@@ -2797,7 +2797,7 @@
             </a:lvl1pPr>
           </a:lstStyle>
           <a:p>
-            <a:fld id="{0A387B6E-F5CE-405A-82B3-C90B6E12C8CC}" type="slidenum">
+            <a:fld id="{8F2CE58B-A142-4C3F-8AD7-52D72A69B6D1}" type="slidenum">
               <a:rPr lang="en-US"/>
               <a:t>‹#›</a:t>
             </a:fld>
@@ -3600,7 +3600,7 @@
           <a:p>
             <a:r>
               <a:rPr lang="ko-KR"/>
-              <a:t>한여름에 올립니다, 시원하게 와 주세요</a:t>
+              <a:t>정성껏 올립니다, 편하게 와 주세요</a:t>
             </a:r>
           </a:p>
         </p:txBody>
@@ -3628,7 +3628,7 @@
           <a:p>
             <a:r>
               <a:rPr lang="ko-KR"/>
-              <a:t>0000. 00. 00 · 예식장 이름</a:t>
+              <a:t>날짜 입력 · 예식장 이름</a:t>
             </a:r>
           </a:p>
         </p:txBody>
@@ -3863,7 +3863,7 @@
           <a:bodyPr/>
           <a:lstStyle/>
           <a:p>
-            <a:fld id="{44398DD8-C3F5-48AC-92E6-F6D75CCDF433}" type="slidenum">
+            <a:fld id="{42405E20-143F-4A6B-84F2-F439D326374A}" type="slidenum">
               <a:rPr lang="en-US"/>
               <a:t>‹#›</a:t>
             </a:fld>
@@ -4265,7 +4265,7 @@
           <a:bodyPr/>
           <a:lstStyle/>
           <a:p>
-            <a:fld id="{2F49CE04-FB5F-4944-AE69-F578005884F6}" type="slidenum">
+            <a:fld id="{4857EA40-65E1-407D-AA45-E7BBE5C86D03}" type="slidenum">
               <a:rPr lang="en-US"/>
               <a:t>‹#›</a:t>
             </a:fld>
@@ -4863,7 +4863,7 @@
           <a:bodyPr/>
           <a:lstStyle/>
           <a:p>
-            <a:fld id="{E3D20AFC-C3C8-44B7-ADCD-FD31BF86237E}" type="slidenum">
+            <a:fld id="{625CF436-2D68-4E62-926D-9FC81BD68E2D}" type="slidenum">
               <a:rPr lang="en-US"/>
               <a:t>‹#›</a:t>
             </a:fld>
@@ -5765,7 +5765,7 @@
           <a:bodyPr/>
           <a:lstStyle/>
           <a:p>
-            <a:fld id="{E5854BD0-866F-4438-B797-739308AF0566}" type="slidenum">
+            <a:fld id="{E70DC709-73DF-4C06-8C66-E4538B32F196}" type="slidenum">
               <a:rPr lang="en-US"/>
               <a:t>‹#›</a:t>
             </a:fld>
@@ -5853,7 +5853,7 @@
           <a:bodyPr/>
           <a:lstStyle/>
           <a:p>
-            <a:fld id="{B861CDC3-1C23-4CD4-879C-8C4D348CA84D}" type="slidenum">
+            <a:fld id="{81B94451-653C-4D25-9F70-960EFC218C8B}" type="slidenum">
               <a:rPr lang="en-US"/>
               <a:t>‹#›</a:t>
             </a:fld>
